--- a/Crop_Disease_Forecasting_Pitch_Deck.pptx
+++ b/Crop_Disease_Forecasting_Pitch_Deck.pptx
@@ -3232,7 +3232,7 @@
                 </a:solidFill>
                 <a:latin typeface="Segoe UI"/>
               </a:rPr>
-              <a:t>MINOR PROJECT  ·  DEPARTMENT OF COMPUTING TECHNOLOGIES</a:t>
+              <a:t>SEVA INNOVATION CHALLENGE  ·  PANEL NUMBER 0696</a:t>
             </a:r>
           </a:p>
         </p:txBody>
@@ -3359,7 +3359,7 @@
                 </a:solidFill>
                 <a:latin typeface="Segoe UI"/>
               </a:rPr>
-              <a:t>Animesh Gupta  ·  Apurva Singh  ·  Aastha Hotwani  ·  Harsh Khetan</a:t>
+              <a:t>Animesh Gupta  ·  Panel Number: 0696</a:t>
             </a:r>
           </a:p>
         </p:txBody>
@@ -12255,7 +12255,7 @@
                 </a:solidFill>
                 <a:latin typeface="Segoe UI"/>
               </a:rPr>
-              <a:t>Animesh Gupta   ·   Apurva Singh   ·   Aastha Hotwani   ·   Harsh Khetan</a:t>
+              <a:t>Animesh Gupta   ·   Panel Number: 0696</a:t>
             </a:r>
           </a:p>
         </p:txBody>
